--- a/CSE281/Lecture 8.pptx
+++ b/CSE281/Lecture 8.pptx
@@ -8,9 +8,11 @@
     <p:sldId id="256" r:id="rId2"/>
     <p:sldId id="257" r:id="rId3"/>
     <p:sldId id="258" r:id="rId4"/>
-    <p:sldId id="259" r:id="rId5"/>
-    <p:sldId id="260" r:id="rId6"/>
-    <p:sldId id="261" r:id="rId7"/>
+    <p:sldId id="262" r:id="rId5"/>
+    <p:sldId id="263" r:id="rId6"/>
+    <p:sldId id="259" r:id="rId7"/>
+    <p:sldId id="260" r:id="rId8"/>
+    <p:sldId id="261" r:id="rId9"/>
   </p:sldIdLst>
   <p:sldSz cx="12192000" cy="6858000"/>
   <p:notesSz cx="6858000" cy="9144000"/>
@@ -191,7 +193,7 @@
           </a:lstStyle>
           <a:p>
             <a:r>
-              <a:rPr lang="en-US" smtClean="0"/>
+              <a:rPr lang="en-US"/>
               <a:t>Click to edit Master title style</a:t>
             </a:r>
             <a:endParaRPr lang="en-US" dirty="0"/>
@@ -258,7 +260,7 @@
           </a:lstStyle>
           <a:p>
             <a:r>
-              <a:rPr lang="en-US" smtClean="0"/>
+              <a:rPr lang="en-US"/>
               <a:t>Click to edit Master subtitle style</a:t>
             </a:r>
             <a:endParaRPr lang="en-US" dirty="0"/>
@@ -287,7 +289,7 @@
           <a:p>
             <a:fld id="{48A87A34-81AB-432B-8DAE-1953F412C126}" type="datetimeFigureOut">
               <a:rPr lang="en-US" dirty="0"/>
-              <a:t>5/5/2025</a:t>
+              <a:t>11/23/2025</a:t>
             </a:fld>
             <a:endParaRPr lang="en-US" dirty="0"/>
           </a:p>
@@ -395,7 +397,7 @@
           </a:lstStyle>
           <a:p>
             <a:r>
-              <a:rPr lang="en-US" smtClean="0"/>
+              <a:rPr lang="en-US"/>
               <a:t>Click to edit Master title style</a:t>
             </a:r>
             <a:endParaRPr lang="en-US" dirty="0"/>
@@ -460,7 +462,7 @@
           </a:lstStyle>
           <a:p>
             <a:r>
-              <a:rPr lang="en-US" smtClean="0"/>
+              <a:rPr lang="en-US"/>
               <a:t>Click icon to add picture</a:t>
             </a:r>
             <a:endParaRPr lang="en-US" dirty="0"/>
@@ -526,7 +528,7 @@
           <a:p>
             <a:pPr lvl="0"/>
             <a:r>
-              <a:rPr lang="en-US" smtClean="0"/>
+              <a:rPr lang="en-US"/>
               <a:t>Edit Master text styles</a:t>
             </a:r>
           </a:p>
@@ -549,7 +551,7 @@
           <a:p>
             <a:fld id="{48A87A34-81AB-432B-8DAE-1953F412C126}" type="datetimeFigureOut">
               <a:rPr lang="en-US" dirty="0"/>
-              <a:t>5/5/2025</a:t>
+              <a:t>11/23/2025</a:t>
             </a:fld>
             <a:endParaRPr lang="en-US" dirty="0"/>
           </a:p>
@@ -677,7 +679,7 @@
           </a:lstStyle>
           <a:p>
             <a:r>
-              <a:rPr lang="en-US" smtClean="0"/>
+              <a:rPr lang="en-US"/>
               <a:t>Click to edit Master title style</a:t>
             </a:r>
             <a:endParaRPr lang="en-US" dirty="0"/>
@@ -743,7 +745,7 @@
           <a:p>
             <a:pPr lvl="0"/>
             <a:r>
-              <a:rPr lang="en-US" smtClean="0"/>
+              <a:rPr lang="en-US"/>
               <a:t>Edit Master text styles</a:t>
             </a:r>
           </a:p>
@@ -776,7 +778,7 @@
             <a:fld id="{48A87A34-81AB-432B-8DAE-1953F412C126}" type="datetimeFigureOut">
               <a:rPr lang="en-US" dirty="0"/>
               <a:pPr/>
-              <a:t>5/5/2025</a:t>
+              <a:t>11/23/2025</a:t>
             </a:fld>
             <a:endParaRPr lang="en-US" dirty="0"/>
           </a:p>
@@ -914,7 +916,7 @@
           </a:lstStyle>
           <a:p>
             <a:r>
-              <a:rPr lang="en-US" smtClean="0"/>
+              <a:rPr lang="en-US"/>
               <a:t>Click to edit Master title style</a:t>
             </a:r>
             <a:endParaRPr lang="en-US" dirty="0"/>
@@ -982,7 +984,7 @@
           <a:p>
             <a:pPr lvl="0"/>
             <a:r>
-              <a:rPr lang="en-US" smtClean="0"/>
+              <a:rPr lang="en-US"/>
               <a:t>Edit Master text styles</a:t>
             </a:r>
           </a:p>
@@ -1049,7 +1051,7 @@
           <a:p>
             <a:pPr lvl="0"/>
             <a:r>
-              <a:rPr lang="en-US" smtClean="0"/>
+              <a:rPr lang="en-US"/>
               <a:t>Edit Master text styles</a:t>
             </a:r>
           </a:p>
@@ -1082,7 +1084,7 @@
             <a:fld id="{48A87A34-81AB-432B-8DAE-1953F412C126}" type="datetimeFigureOut">
               <a:rPr lang="en-US" dirty="0"/>
               <a:pPr/>
-              <a:t>5/5/2025</a:t>
+              <a:t>11/23/2025</a:t>
             </a:fld>
             <a:endParaRPr lang="en-US" dirty="0"/>
           </a:p>
@@ -1452,7 +1454,7 @@
           </a:lstStyle>
           <a:p>
             <a:r>
-              <a:rPr lang="en-US" smtClean="0"/>
+              <a:rPr lang="en-US"/>
               <a:t>Click to edit Master title style</a:t>
             </a:r>
             <a:endParaRPr lang="en-US" dirty="0"/>
@@ -1518,7 +1520,7 @@
           <a:p>
             <a:pPr lvl="0"/>
             <a:r>
-              <a:rPr lang="en-US" smtClean="0"/>
+              <a:rPr lang="en-US"/>
               <a:t>Edit Master text styles</a:t>
             </a:r>
           </a:p>
@@ -1551,7 +1553,7 @@
             <a:fld id="{48A87A34-81AB-432B-8DAE-1953F412C126}" type="datetimeFigureOut">
               <a:rPr lang="en-US" dirty="0"/>
               <a:pPr/>
-              <a:t>5/5/2025</a:t>
+              <a:t>11/23/2025</a:t>
             </a:fld>
             <a:endParaRPr lang="en-US" dirty="0"/>
           </a:p>
@@ -1655,7 +1657,7 @@
           <a:lstStyle/>
           <a:p>
             <a:r>
-              <a:rPr lang="en-US" smtClean="0"/>
+              <a:rPr lang="en-US"/>
               <a:t>Click to edit Master title style</a:t>
             </a:r>
             <a:endParaRPr lang="en-US" dirty="0"/>
@@ -1727,7 +1729,7 @@
           <a:p>
             <a:pPr lvl="0"/>
             <a:r>
-              <a:rPr lang="en-US" smtClean="0"/>
+              <a:rPr lang="en-US"/>
               <a:t>Edit Master text styles</a:t>
             </a:r>
           </a:p>
@@ -1794,7 +1796,7 @@
           <a:p>
             <a:pPr lvl="0"/>
             <a:r>
-              <a:rPr lang="en-US" smtClean="0"/>
+              <a:rPr lang="en-US"/>
               <a:t>Edit Master text styles</a:t>
             </a:r>
           </a:p>
@@ -1865,7 +1867,7 @@
           <a:p>
             <a:pPr lvl="0"/>
             <a:r>
-              <a:rPr lang="en-US" smtClean="0"/>
+              <a:rPr lang="en-US"/>
               <a:t>Edit Master text styles</a:t>
             </a:r>
           </a:p>
@@ -1932,7 +1934,7 @@
           <a:p>
             <a:pPr lvl="0"/>
             <a:r>
-              <a:rPr lang="en-US" smtClean="0"/>
+              <a:rPr lang="en-US"/>
               <a:t>Edit Master text styles</a:t>
             </a:r>
           </a:p>
@@ -2003,7 +2005,7 @@
           <a:p>
             <a:pPr lvl="0"/>
             <a:r>
-              <a:rPr lang="en-US" smtClean="0"/>
+              <a:rPr lang="en-US"/>
               <a:t>Edit Master text styles</a:t>
             </a:r>
           </a:p>
@@ -2070,7 +2072,7 @@
           <a:p>
             <a:pPr lvl="0"/>
             <a:r>
-              <a:rPr lang="en-US" smtClean="0"/>
+              <a:rPr lang="en-US"/>
               <a:t>Edit Master text styles</a:t>
             </a:r>
           </a:p>
@@ -2093,7 +2095,7 @@
           <a:p>
             <a:fld id="{48A87A34-81AB-432B-8DAE-1953F412C126}" type="datetimeFigureOut">
               <a:rPr lang="en-US" dirty="0"/>
-              <a:t>5/5/2025</a:t>
+              <a:t>11/23/2025</a:t>
             </a:fld>
             <a:endParaRPr lang="en-US" dirty="0"/>
           </a:p>
@@ -2187,7 +2189,7 @@
           <a:lstStyle/>
           <a:p>
             <a:r>
-              <a:rPr lang="en-US" smtClean="0"/>
+              <a:rPr lang="en-US"/>
               <a:t>Click to edit Master title style</a:t>
             </a:r>
             <a:endParaRPr lang="en-US" dirty="0"/>
@@ -2259,7 +2261,7 @@
           <a:p>
             <a:pPr lvl="0"/>
             <a:r>
-              <a:rPr lang="en-US" smtClean="0"/>
+              <a:rPr lang="en-US"/>
               <a:t>Edit Master text styles</a:t>
             </a:r>
           </a:p>
@@ -2337,7 +2339,7 @@
           </a:lstStyle>
           <a:p>
             <a:r>
-              <a:rPr lang="en-US" smtClean="0"/>
+              <a:rPr lang="en-US"/>
               <a:t>Click icon to add picture</a:t>
             </a:r>
             <a:endParaRPr lang="en-US" dirty="0"/>
@@ -2405,7 +2407,7 @@
           <a:p>
             <a:pPr lvl="0"/>
             <a:r>
-              <a:rPr lang="en-US" smtClean="0"/>
+              <a:rPr lang="en-US"/>
               <a:t>Edit Master text styles</a:t>
             </a:r>
           </a:p>
@@ -2476,7 +2478,7 @@
           <a:p>
             <a:pPr lvl="0"/>
             <a:r>
-              <a:rPr lang="en-US" smtClean="0"/>
+              <a:rPr lang="en-US"/>
               <a:t>Edit Master text styles</a:t>
             </a:r>
           </a:p>
@@ -2554,7 +2556,7 @@
           </a:lstStyle>
           <a:p>
             <a:r>
-              <a:rPr lang="en-US" smtClean="0"/>
+              <a:rPr lang="en-US"/>
               <a:t>Click icon to add picture</a:t>
             </a:r>
             <a:endParaRPr lang="en-US" dirty="0"/>
@@ -2622,7 +2624,7 @@
           <a:p>
             <a:pPr lvl="0"/>
             <a:r>
-              <a:rPr lang="en-US" smtClean="0"/>
+              <a:rPr lang="en-US"/>
               <a:t>Edit Master text styles</a:t>
             </a:r>
           </a:p>
@@ -2693,7 +2695,7 @@
           <a:p>
             <a:pPr lvl="0"/>
             <a:r>
-              <a:rPr lang="en-US" smtClean="0"/>
+              <a:rPr lang="en-US"/>
               <a:t>Edit Master text styles</a:t>
             </a:r>
           </a:p>
@@ -2771,7 +2773,7 @@
           </a:lstStyle>
           <a:p>
             <a:r>
-              <a:rPr lang="en-US" smtClean="0"/>
+              <a:rPr lang="en-US"/>
               <a:t>Click icon to add picture</a:t>
             </a:r>
             <a:endParaRPr lang="en-US" dirty="0"/>
@@ -2839,7 +2841,7 @@
           <a:p>
             <a:pPr lvl="0"/>
             <a:r>
-              <a:rPr lang="en-US" smtClean="0"/>
+              <a:rPr lang="en-US"/>
               <a:t>Edit Master text styles</a:t>
             </a:r>
           </a:p>
@@ -2862,7 +2864,7 @@
           <a:p>
             <a:fld id="{48A87A34-81AB-432B-8DAE-1953F412C126}" type="datetimeFigureOut">
               <a:rPr lang="en-US" dirty="0"/>
-              <a:t>5/5/2025</a:t>
+              <a:t>11/23/2025</a:t>
             </a:fld>
             <a:endParaRPr lang="en-US" dirty="0"/>
           </a:p>
@@ -2951,7 +2953,7 @@
           <a:lstStyle/>
           <a:p>
             <a:r>
-              <a:rPr lang="en-US" smtClean="0"/>
+              <a:rPr lang="en-US"/>
               <a:t>Click to edit Master title style</a:t>
             </a:r>
             <a:endParaRPr lang="en-US" dirty="0"/>
@@ -2980,35 +2982,35 @@
           <a:p>
             <a:pPr lvl="0"/>
             <a:r>
-              <a:rPr lang="en-US" smtClean="0"/>
+              <a:rPr lang="en-US"/>
               <a:t>Edit Master text styles</a:t>
             </a:r>
           </a:p>
           <a:p>
             <a:pPr lvl="1"/>
             <a:r>
-              <a:rPr lang="en-US" smtClean="0"/>
+              <a:rPr lang="en-US"/>
               <a:t>Second level</a:t>
             </a:r>
           </a:p>
           <a:p>
             <a:pPr lvl="2"/>
             <a:r>
-              <a:rPr lang="en-US" smtClean="0"/>
+              <a:rPr lang="en-US"/>
               <a:t>Third level</a:t>
             </a:r>
           </a:p>
           <a:p>
             <a:pPr lvl="3"/>
             <a:r>
-              <a:rPr lang="en-US" smtClean="0"/>
+              <a:rPr lang="en-US"/>
               <a:t>Fourth level</a:t>
             </a:r>
           </a:p>
           <a:p>
             <a:pPr lvl="4"/>
             <a:r>
-              <a:rPr lang="en-US" smtClean="0"/>
+              <a:rPr lang="en-US"/>
               <a:t>Fifth level</a:t>
             </a:r>
             <a:endParaRPr lang="en-US" dirty="0"/>
@@ -3032,7 +3034,7 @@
           <a:p>
             <a:fld id="{48A87A34-81AB-432B-8DAE-1953F412C126}" type="datetimeFigureOut">
               <a:rPr lang="en-US" dirty="0"/>
-              <a:t>5/5/2025</a:t>
+              <a:t>11/23/2025</a:t>
             </a:fld>
             <a:endParaRPr lang="en-US" dirty="0"/>
           </a:p>
@@ -3160,7 +3162,7 @@
           </a:lstStyle>
           <a:p>
             <a:r>
-              <a:rPr lang="en-US" smtClean="0"/>
+              <a:rPr lang="en-US"/>
               <a:t>Click to edit Master title style</a:t>
             </a:r>
             <a:endParaRPr lang="en-US" dirty="0"/>
@@ -3189,35 +3191,35 @@
           <a:p>
             <a:pPr lvl="0"/>
             <a:r>
-              <a:rPr lang="en-US" smtClean="0"/>
+              <a:rPr lang="en-US"/>
               <a:t>Edit Master text styles</a:t>
             </a:r>
           </a:p>
           <a:p>
             <a:pPr lvl="1"/>
             <a:r>
-              <a:rPr lang="en-US" smtClean="0"/>
+              <a:rPr lang="en-US"/>
               <a:t>Second level</a:t>
             </a:r>
           </a:p>
           <a:p>
             <a:pPr lvl="2"/>
             <a:r>
-              <a:rPr lang="en-US" smtClean="0"/>
+              <a:rPr lang="en-US"/>
               <a:t>Third level</a:t>
             </a:r>
           </a:p>
           <a:p>
             <a:pPr lvl="3"/>
             <a:r>
-              <a:rPr lang="en-US" smtClean="0"/>
+              <a:rPr lang="en-US"/>
               <a:t>Fourth level</a:t>
             </a:r>
           </a:p>
           <a:p>
             <a:pPr lvl="4"/>
             <a:r>
-              <a:rPr lang="en-US" smtClean="0"/>
+              <a:rPr lang="en-US"/>
               <a:t>Fifth level</a:t>
             </a:r>
             <a:endParaRPr lang="en-US" dirty="0"/>
@@ -3251,7 +3253,7 @@
             <a:fld id="{48A87A34-81AB-432B-8DAE-1953F412C126}" type="datetimeFigureOut">
               <a:rPr lang="en-US" dirty="0"/>
               <a:pPr/>
-              <a:t>5/5/2025</a:t>
+              <a:t>11/23/2025</a:t>
             </a:fld>
             <a:endParaRPr lang="en-US" dirty="0"/>
           </a:p>
@@ -3350,7 +3352,7 @@
           <a:lstStyle/>
           <a:p>
             <a:r>
-              <a:rPr lang="en-US" smtClean="0"/>
+              <a:rPr lang="en-US"/>
               <a:t>Click to edit Master title style</a:t>
             </a:r>
             <a:endParaRPr lang="en-US" dirty="0"/>
@@ -3374,35 +3376,35 @@
           <a:p>
             <a:pPr lvl="0"/>
             <a:r>
-              <a:rPr lang="en-US" smtClean="0"/>
+              <a:rPr lang="en-US"/>
               <a:t>Edit Master text styles</a:t>
             </a:r>
           </a:p>
           <a:p>
             <a:pPr lvl="1"/>
             <a:r>
-              <a:rPr lang="en-US" smtClean="0"/>
+              <a:rPr lang="en-US"/>
               <a:t>Second level</a:t>
             </a:r>
           </a:p>
           <a:p>
             <a:pPr lvl="2"/>
             <a:r>
-              <a:rPr lang="en-US" smtClean="0"/>
+              <a:rPr lang="en-US"/>
               <a:t>Third level</a:t>
             </a:r>
           </a:p>
           <a:p>
             <a:pPr lvl="3"/>
             <a:r>
-              <a:rPr lang="en-US" smtClean="0"/>
+              <a:rPr lang="en-US"/>
               <a:t>Fourth level</a:t>
             </a:r>
           </a:p>
           <a:p>
             <a:pPr lvl="4"/>
             <a:r>
-              <a:rPr lang="en-US" smtClean="0"/>
+              <a:rPr lang="en-US"/>
               <a:t>Fifth level</a:t>
             </a:r>
             <a:endParaRPr lang="en-US" dirty="0"/>
@@ -3426,7 +3428,7 @@
           <a:p>
             <a:fld id="{48A87A34-81AB-432B-8DAE-1953F412C126}" type="datetimeFigureOut">
               <a:rPr lang="en-US" dirty="0"/>
-              <a:t>5/5/2025</a:t>
+              <a:t>11/23/2025</a:t>
             </a:fld>
             <a:endParaRPr lang="en-US" dirty="0"/>
           </a:p>
@@ -3556,7 +3558,7 @@
           </a:lstStyle>
           <a:p>
             <a:r>
-              <a:rPr lang="en-US" smtClean="0"/>
+              <a:rPr lang="en-US"/>
               <a:t>Click to edit Master title style</a:t>
             </a:r>
             <a:endParaRPr lang="en-US" dirty="0"/>
@@ -3678,7 +3680,7 @@
           <a:p>
             <a:pPr lvl="0"/>
             <a:r>
-              <a:rPr lang="en-US" smtClean="0"/>
+              <a:rPr lang="en-US"/>
               <a:t>Edit Master text styles</a:t>
             </a:r>
           </a:p>
@@ -3711,7 +3713,7 @@
             <a:fld id="{48A87A34-81AB-432B-8DAE-1953F412C126}" type="datetimeFigureOut">
               <a:rPr lang="en-US" dirty="0"/>
               <a:pPr/>
-              <a:t>5/5/2025</a:t>
+              <a:t>11/23/2025</a:t>
             </a:fld>
             <a:endParaRPr lang="en-US" dirty="0"/>
           </a:p>
@@ -3810,7 +3812,7 @@
           <a:lstStyle/>
           <a:p>
             <a:r>
-              <a:rPr lang="en-US" smtClean="0"/>
+              <a:rPr lang="en-US"/>
               <a:t>Click to edit Master title style</a:t>
             </a:r>
             <a:endParaRPr lang="en-US" dirty="0"/>
@@ -3839,35 +3841,35 @@
           <a:p>
             <a:pPr lvl="0"/>
             <a:r>
-              <a:rPr lang="en-US" smtClean="0"/>
+              <a:rPr lang="en-US"/>
               <a:t>Edit Master text styles</a:t>
             </a:r>
           </a:p>
           <a:p>
             <a:pPr lvl="1"/>
             <a:r>
-              <a:rPr lang="en-US" smtClean="0"/>
+              <a:rPr lang="en-US"/>
               <a:t>Second level</a:t>
             </a:r>
           </a:p>
           <a:p>
             <a:pPr lvl="2"/>
             <a:r>
-              <a:rPr lang="en-US" smtClean="0"/>
+              <a:rPr lang="en-US"/>
               <a:t>Third level</a:t>
             </a:r>
           </a:p>
           <a:p>
             <a:pPr lvl="3"/>
             <a:r>
-              <a:rPr lang="en-US" smtClean="0"/>
+              <a:rPr lang="en-US"/>
               <a:t>Fourth level</a:t>
             </a:r>
           </a:p>
           <a:p>
             <a:pPr lvl="4"/>
             <a:r>
-              <a:rPr lang="en-US" smtClean="0"/>
+              <a:rPr lang="en-US"/>
               <a:t>Fifth level</a:t>
             </a:r>
             <a:endParaRPr lang="en-US" dirty="0"/>
@@ -3896,35 +3898,35 @@
           <a:p>
             <a:pPr lvl="0"/>
             <a:r>
-              <a:rPr lang="en-US" smtClean="0"/>
+              <a:rPr lang="en-US"/>
               <a:t>Edit Master text styles</a:t>
             </a:r>
           </a:p>
           <a:p>
             <a:pPr lvl="1"/>
             <a:r>
-              <a:rPr lang="en-US" smtClean="0"/>
+              <a:rPr lang="en-US"/>
               <a:t>Second level</a:t>
             </a:r>
           </a:p>
           <a:p>
             <a:pPr lvl="2"/>
             <a:r>
-              <a:rPr lang="en-US" smtClean="0"/>
+              <a:rPr lang="en-US"/>
               <a:t>Third level</a:t>
             </a:r>
           </a:p>
           <a:p>
             <a:pPr lvl="3"/>
             <a:r>
-              <a:rPr lang="en-US" smtClean="0"/>
+              <a:rPr lang="en-US"/>
               <a:t>Fourth level</a:t>
             </a:r>
           </a:p>
           <a:p>
             <a:pPr lvl="4"/>
             <a:r>
-              <a:rPr lang="en-US" smtClean="0"/>
+              <a:rPr lang="en-US"/>
               <a:t>Fifth level</a:t>
             </a:r>
             <a:endParaRPr lang="en-US" dirty="0"/>
@@ -3948,7 +3950,7 @@
           <a:p>
             <a:fld id="{48A87A34-81AB-432B-8DAE-1953F412C126}" type="datetimeFigureOut">
               <a:rPr lang="en-US" dirty="0"/>
-              <a:t>5/5/2025</a:t>
+              <a:t>11/23/2025</a:t>
             </a:fld>
             <a:endParaRPr lang="en-US" dirty="0"/>
           </a:p>
@@ -4042,7 +4044,7 @@
           <a:lstStyle/>
           <a:p>
             <a:r>
-              <a:rPr lang="en-US" smtClean="0"/>
+              <a:rPr lang="en-US"/>
               <a:t>Click to edit Master title style</a:t>
             </a:r>
             <a:endParaRPr lang="en-US" dirty="0"/>
@@ -4114,7 +4116,7 @@
           <a:p>
             <a:pPr lvl="0"/>
             <a:r>
-              <a:rPr lang="en-US" smtClean="0"/>
+              <a:rPr lang="en-US"/>
               <a:t>Edit Master text styles</a:t>
             </a:r>
           </a:p>
@@ -4142,35 +4144,35 @@
           <a:p>
             <a:pPr lvl="0"/>
             <a:r>
-              <a:rPr lang="en-US" smtClean="0"/>
+              <a:rPr lang="en-US"/>
               <a:t>Edit Master text styles</a:t>
             </a:r>
           </a:p>
           <a:p>
             <a:pPr lvl="1"/>
             <a:r>
-              <a:rPr lang="en-US" smtClean="0"/>
+              <a:rPr lang="en-US"/>
               <a:t>Second level</a:t>
             </a:r>
           </a:p>
           <a:p>
             <a:pPr lvl="2"/>
             <a:r>
-              <a:rPr lang="en-US" smtClean="0"/>
+              <a:rPr lang="en-US"/>
               <a:t>Third level</a:t>
             </a:r>
           </a:p>
           <a:p>
             <a:pPr lvl="3"/>
             <a:r>
-              <a:rPr lang="en-US" smtClean="0"/>
+              <a:rPr lang="en-US"/>
               <a:t>Fourth level</a:t>
             </a:r>
           </a:p>
           <a:p>
             <a:pPr lvl="4"/>
             <a:r>
-              <a:rPr lang="en-US" smtClean="0"/>
+              <a:rPr lang="en-US"/>
               <a:t>Fifth level</a:t>
             </a:r>
             <a:endParaRPr lang="en-US" dirty="0"/>
@@ -4242,7 +4244,7 @@
           <a:p>
             <a:pPr lvl="0"/>
             <a:r>
-              <a:rPr lang="en-US" smtClean="0"/>
+              <a:rPr lang="en-US"/>
               <a:t>Edit Master text styles</a:t>
             </a:r>
           </a:p>
@@ -4270,35 +4272,35 @@
           <a:p>
             <a:pPr lvl="0"/>
             <a:r>
-              <a:rPr lang="en-US" smtClean="0"/>
+              <a:rPr lang="en-US"/>
               <a:t>Edit Master text styles</a:t>
             </a:r>
           </a:p>
           <a:p>
             <a:pPr lvl="1"/>
             <a:r>
-              <a:rPr lang="en-US" smtClean="0"/>
+              <a:rPr lang="en-US"/>
               <a:t>Second level</a:t>
             </a:r>
           </a:p>
           <a:p>
             <a:pPr lvl="2"/>
             <a:r>
-              <a:rPr lang="en-US" smtClean="0"/>
+              <a:rPr lang="en-US"/>
               <a:t>Third level</a:t>
             </a:r>
           </a:p>
           <a:p>
             <a:pPr lvl="3"/>
             <a:r>
-              <a:rPr lang="en-US" smtClean="0"/>
+              <a:rPr lang="en-US"/>
               <a:t>Fourth level</a:t>
             </a:r>
           </a:p>
           <a:p>
             <a:pPr lvl="4"/>
             <a:r>
-              <a:rPr lang="en-US" smtClean="0"/>
+              <a:rPr lang="en-US"/>
               <a:t>Fifth level</a:t>
             </a:r>
             <a:endParaRPr lang="en-US" dirty="0"/>
@@ -4322,7 +4324,7 @@
           <a:p>
             <a:fld id="{48A87A34-81AB-432B-8DAE-1953F412C126}" type="datetimeFigureOut">
               <a:rPr lang="en-US" dirty="0"/>
-              <a:t>5/5/2025</a:t>
+              <a:t>11/23/2025</a:t>
             </a:fld>
             <a:endParaRPr lang="en-US" dirty="0"/>
           </a:p>
@@ -4411,7 +4413,7 @@
           <a:lstStyle/>
           <a:p>
             <a:r>
-              <a:rPr lang="en-US" smtClean="0"/>
+              <a:rPr lang="en-US"/>
               <a:t>Click to edit Master title style</a:t>
             </a:r>
             <a:endParaRPr lang="en-US" dirty="0"/>
@@ -4435,7 +4437,7 @@
           <a:p>
             <a:fld id="{48A87A34-81AB-432B-8DAE-1953F412C126}" type="datetimeFigureOut">
               <a:rPr lang="en-US" dirty="0"/>
-              <a:t>5/5/2025</a:t>
+              <a:t>11/23/2025</a:t>
             </a:fld>
             <a:endParaRPr lang="en-US" dirty="0"/>
           </a:p>
@@ -4525,7 +4527,7 @@
           <a:p>
             <a:fld id="{48A87A34-81AB-432B-8DAE-1953F412C126}" type="datetimeFigureOut">
               <a:rPr lang="en-US" dirty="0"/>
-              <a:t>5/5/2025</a:t>
+              <a:t>11/23/2025</a:t>
             </a:fld>
             <a:endParaRPr lang="en-US" dirty="0"/>
           </a:p>
@@ -4623,7 +4625,7 @@
           </a:lstStyle>
           <a:p>
             <a:r>
-              <a:rPr lang="en-US" smtClean="0"/>
+              <a:rPr lang="en-US"/>
               <a:t>Click to edit Master title style</a:t>
             </a:r>
             <a:endParaRPr lang="en-US" dirty="0"/>
@@ -4652,35 +4654,35 @@
           <a:p>
             <a:pPr lvl="0"/>
             <a:r>
-              <a:rPr lang="en-US" smtClean="0"/>
+              <a:rPr lang="en-US"/>
               <a:t>Edit Master text styles</a:t>
             </a:r>
           </a:p>
           <a:p>
             <a:pPr lvl="1"/>
             <a:r>
-              <a:rPr lang="en-US" smtClean="0"/>
+              <a:rPr lang="en-US"/>
               <a:t>Second level</a:t>
             </a:r>
           </a:p>
           <a:p>
             <a:pPr lvl="2"/>
             <a:r>
-              <a:rPr lang="en-US" smtClean="0"/>
+              <a:rPr lang="en-US"/>
               <a:t>Third level</a:t>
             </a:r>
           </a:p>
           <a:p>
             <a:pPr lvl="3"/>
             <a:r>
-              <a:rPr lang="en-US" smtClean="0"/>
+              <a:rPr lang="en-US"/>
               <a:t>Fourth level</a:t>
             </a:r>
           </a:p>
           <a:p>
             <a:pPr lvl="4"/>
             <a:r>
-              <a:rPr lang="en-US" smtClean="0"/>
+              <a:rPr lang="en-US"/>
               <a:t>Fifth level</a:t>
             </a:r>
             <a:endParaRPr lang="en-US" dirty="0"/>
@@ -4746,7 +4748,7 @@
           <a:p>
             <a:pPr lvl="0"/>
             <a:r>
-              <a:rPr lang="en-US" smtClean="0"/>
+              <a:rPr lang="en-US"/>
               <a:t>Edit Master text styles</a:t>
             </a:r>
           </a:p>
@@ -4769,7 +4771,7 @@
           <a:p>
             <a:fld id="{48A87A34-81AB-432B-8DAE-1953F412C126}" type="datetimeFigureOut">
               <a:rPr lang="en-US" dirty="0"/>
-              <a:t>5/5/2025</a:t>
+              <a:t>11/23/2025</a:t>
             </a:fld>
             <a:endParaRPr lang="en-US" dirty="0"/>
           </a:p>
@@ -4867,7 +4869,7 @@
           </a:lstStyle>
           <a:p>
             <a:r>
-              <a:rPr lang="en-US" smtClean="0"/>
+              <a:rPr lang="en-US"/>
               <a:t>Click to edit Master title style</a:t>
             </a:r>
             <a:endParaRPr lang="en-US" dirty="0"/>
@@ -4932,7 +4934,7 @@
           </a:lstStyle>
           <a:p>
             <a:r>
-              <a:rPr lang="en-US" smtClean="0"/>
+              <a:rPr lang="en-US"/>
               <a:t>Click icon to add picture</a:t>
             </a:r>
             <a:endParaRPr lang="en-US" dirty="0"/>
@@ -4998,7 +5000,7 @@
           <a:p>
             <a:pPr lvl="0"/>
             <a:r>
-              <a:rPr lang="en-US" smtClean="0"/>
+              <a:rPr lang="en-US"/>
               <a:t>Edit Master text styles</a:t>
             </a:r>
           </a:p>
@@ -5021,7 +5023,7 @@
           <a:p>
             <a:fld id="{48A87A34-81AB-432B-8DAE-1953F412C126}" type="datetimeFigureOut">
               <a:rPr lang="en-US" dirty="0"/>
-              <a:t>5/5/2025</a:t>
+              <a:t>11/23/2025</a:t>
             </a:fld>
             <a:endParaRPr lang="en-US" dirty="0"/>
           </a:p>
@@ -5155,7 +5157,7 @@
           <a:lstStyle/>
           <a:p>
             <a:r>
-              <a:rPr lang="en-US" smtClean="0"/>
+              <a:rPr lang="en-US"/>
               <a:t>Click to edit Master title style</a:t>
             </a:r>
             <a:endParaRPr lang="en-US" dirty="0"/>
@@ -5189,35 +5191,35 @@
           <a:p>
             <a:pPr lvl="0"/>
             <a:r>
-              <a:rPr lang="en-US" smtClean="0"/>
+              <a:rPr lang="en-US"/>
               <a:t>Edit Master text styles</a:t>
             </a:r>
           </a:p>
           <a:p>
             <a:pPr lvl="1"/>
             <a:r>
-              <a:rPr lang="en-US" smtClean="0"/>
+              <a:rPr lang="en-US"/>
               <a:t>Second level</a:t>
             </a:r>
           </a:p>
           <a:p>
             <a:pPr lvl="2"/>
             <a:r>
-              <a:rPr lang="en-US" smtClean="0"/>
+              <a:rPr lang="en-US"/>
               <a:t>Third level</a:t>
             </a:r>
           </a:p>
           <a:p>
             <a:pPr lvl="3"/>
             <a:r>
-              <a:rPr lang="en-US" smtClean="0"/>
+              <a:rPr lang="en-US"/>
               <a:t>Fourth level</a:t>
             </a:r>
           </a:p>
           <a:p>
             <a:pPr lvl="4"/>
             <a:r>
-              <a:rPr lang="en-US" smtClean="0"/>
+              <a:rPr lang="en-US"/>
               <a:t>Fifth level</a:t>
             </a:r>
             <a:endParaRPr lang="en-US" dirty="0"/>
@@ -5260,7 +5262,7 @@
             <a:fld id="{48A87A34-81AB-432B-8DAE-1953F412C126}" type="datetimeFigureOut">
               <a:rPr lang="en-US" dirty="0"/>
               <a:pPr/>
-              <a:t>5/5/2025</a:t>
+              <a:t>11/23/2025</a:t>
             </a:fld>
             <a:endParaRPr lang="en-US" dirty="0"/>
           </a:p>
@@ -5688,7 +5690,6 @@
               <a:rPr lang="en-US" sz="4000" dirty="0"/>
               <a:t>Introduction to Programming Language II(Java)</a:t>
             </a:r>
-            <a:endParaRPr lang="en-US" sz="4000" dirty="0"/>
           </a:p>
         </p:txBody>
       </p:sp>
@@ -5713,11 +5714,11 @@
           <a:lstStyle/>
           <a:p>
             <a:r>
-              <a:rPr lang="en-US" dirty="0" smtClean="0"/>
+              <a:rPr lang="en-US" dirty="0"/>
               <a:t>Fariha </a:t>
             </a:r>
             <a:r>
-              <a:rPr lang="en-US" dirty="0" err="1" smtClean="0"/>
+              <a:rPr lang="en-US" dirty="0" err="1"/>
               <a:t>Zahin</a:t>
             </a:r>
             <a:endParaRPr lang="en-US" dirty="0"/>
@@ -5779,16 +5780,11 @@
               <a:rPr lang="en-US" b="1" dirty="0"/>
               <a:t>final keyword</a:t>
             </a:r>
-            <a:endParaRPr lang="en-US" b="1" dirty="0" smtClean="0"/>
-          </a:p>
-          <a:p>
-            <a:r>
-              <a:rPr lang="en-US" dirty="0" smtClean="0"/>
-              <a:t>final keyword </a:t>
-            </a:r>
-            <a:r>
-              <a:rPr lang="en-US" dirty="0"/>
-              <a:t>is used to </a:t>
+          </a:p>
+          <a:p>
+            <a:r>
+              <a:rPr lang="en-US" dirty="0"/>
+              <a:t>final keyword is used to </a:t>
             </a:r>
             <a:r>
               <a:rPr lang="en-US" b="1" dirty="0"/>
@@ -5923,7 +5919,7 @@
               <a:t>f</a:t>
             </a:r>
             <a:r>
-              <a:rPr kumimoji="0" lang="en-US" altLang="en-US" sz="1800" b="1" i="0" u="none" strike="noStrike" cap="none" normalizeH="0" baseline="0" dirty="0" smtClean="0">
+              <a:rPr kumimoji="0" lang="en-US" altLang="en-US" sz="1800" b="1" i="0" u="none" strike="noStrike" cap="none" normalizeH="0" baseline="0" dirty="0">
                 <a:ln>
                   <a:noFill/>
                 </a:ln>
@@ -5955,16 +5951,10 @@
               <a:rPr lang="en-US" altLang="en-US" dirty="0">
                 <a:latin typeface="Arial" panose="020B0604020202020204" pitchFamily="34" charset="0"/>
               </a:rPr>
-              <a:t>f</a:t>
-            </a:r>
-            <a:r>
-              <a:rPr lang="en-US" altLang="en-US" dirty="0" smtClean="0">
-                <a:latin typeface="Arial" panose="020B0604020202020204" pitchFamily="34" charset="0"/>
-              </a:rPr>
-              <a:t>inal </a:t>
-            </a:r>
-            <a:r>
-              <a:rPr kumimoji="0" lang="en-US" altLang="en-US" sz="1800" b="0" i="0" u="none" strike="noStrike" cap="none" normalizeH="0" baseline="0" dirty="0" smtClean="0">
+              <a:t>final </a:t>
+            </a:r>
+            <a:r>
+              <a:rPr kumimoji="0" lang="en-US" altLang="en-US" sz="1800" b="0" i="0" u="none" strike="noStrike" cap="none" normalizeH="0" baseline="0" dirty="0">
                 <a:ln>
                   <a:noFill/>
                 </a:ln>
@@ -5977,7 +5967,7 @@
               <a:t>variable is </a:t>
             </a:r>
             <a:r>
-              <a:rPr kumimoji="0" lang="en-US" altLang="en-US" sz="1800" b="1" i="0" u="none" strike="noStrike" cap="none" normalizeH="0" baseline="0" dirty="0" smtClean="0">
+              <a:rPr kumimoji="0" lang="en-US" altLang="en-US" sz="1800" b="1" i="0" u="none" strike="noStrike" cap="none" normalizeH="0" baseline="0" dirty="0">
                 <a:ln>
                   <a:noFill/>
                 </a:ln>
@@ -5990,7 +5980,7 @@
               <a:t>constant</a:t>
             </a:r>
             <a:r>
-              <a:rPr kumimoji="0" lang="en-US" altLang="en-US" sz="1800" b="0" i="0" u="none" strike="noStrike" cap="none" normalizeH="0" baseline="0" dirty="0" smtClean="0">
+              <a:rPr kumimoji="0" lang="en-US" altLang="en-US" sz="1800" b="0" i="0" u="none" strike="noStrike" cap="none" normalizeH="0" baseline="0" dirty="0">
                 <a:ln>
                   <a:noFill/>
                 </a:ln>
@@ -6019,7 +6009,7 @@
               <a:tabLst/>
             </a:pPr>
             <a:r>
-              <a:rPr kumimoji="0" lang="en-US" altLang="en-US" sz="1800" b="0" i="0" u="none" strike="noStrike" cap="none" normalizeH="0" baseline="0" dirty="0" smtClean="0">
+              <a:rPr kumimoji="0" lang="en-US" altLang="en-US" sz="1800" b="0" i="0" u="none" strike="noStrike" cap="none" normalizeH="0" baseline="0" dirty="0">
                 <a:ln>
                   <a:noFill/>
                 </a:ln>
@@ -6050,7 +6040,7 @@
               <a:tabLst/>
             </a:pPr>
             <a:r>
-              <a:rPr kumimoji="0" lang="en-US" altLang="en-US" sz="1800" b="0" i="0" u="none" strike="noStrike" cap="none" normalizeH="0" baseline="0" dirty="0" smtClean="0">
+              <a:rPr kumimoji="0" lang="en-US" altLang="en-US" sz="1800" b="0" i="0" u="none" strike="noStrike" cap="none" normalizeH="0" baseline="0" dirty="0">
                 <a:ln>
                   <a:noFill/>
                 </a:ln>
@@ -6079,7 +6069,7 @@
               <a:tabLst/>
             </a:pPr>
             <a:r>
-              <a:rPr kumimoji="0" lang="en-US" altLang="en-US" sz="1800" b="0" i="0" u="none" strike="noStrike" cap="none" normalizeH="0" baseline="0" dirty="0" smtClean="0">
+              <a:rPr kumimoji="0" lang="en-US" altLang="en-US" sz="1800" b="0" i="0" u="none" strike="noStrike" cap="none" normalizeH="0" baseline="0" dirty="0">
                 <a:ln>
                   <a:noFill/>
                 </a:ln>
@@ -6143,16 +6133,11 @@
               <a:rPr lang="en-US" dirty="0"/>
               <a:t>Declares a constant variable MAX. Attempting to </a:t>
             </a:r>
-            <a:endParaRPr lang="en-US" dirty="0" smtClean="0"/>
-          </a:p>
-          <a:p>
-            <a:r>
-              <a:rPr lang="en-US" dirty="0" smtClean="0"/>
-              <a:t>reassign </a:t>
-            </a:r>
-            <a:r>
-              <a:rPr lang="en-US" dirty="0"/>
-              <a:t>it will cause a compile-time error. </a:t>
+          </a:p>
+          <a:p>
+            <a:r>
+              <a:rPr lang="en-US" dirty="0"/>
+              <a:t>reassign it will cause a compile-time error. </a:t>
             </a:r>
           </a:p>
         </p:txBody>
@@ -6210,13 +6195,8 @@
           <a:p>
             <a:r>
               <a:rPr lang="en-US" b="1" dirty="0"/>
-              <a:t>Blank Final </a:t>
-            </a:r>
-            <a:r>
-              <a:rPr lang="en-US" b="1" dirty="0" smtClean="0"/>
-              <a:t>Variable</a:t>
-            </a:r>
-            <a:endParaRPr lang="en-US" b="1" dirty="0"/>
+              <a:t>Blank Final Variable</a:t>
+            </a:r>
           </a:p>
           <a:p>
             <a:pPr>
@@ -6319,15 +6299,7 @@
           <a:p>
             <a:r>
               <a:rPr lang="en-US" dirty="0"/>
-              <a:t>s</a:t>
-            </a:r>
-            <a:r>
-              <a:rPr lang="en-US" dirty="0" smtClean="0"/>
-              <a:t>peed variable </a:t>
-            </a:r>
-            <a:r>
-              <a:rPr lang="en-US" dirty="0"/>
-              <a:t>is declared but not initialized immediately. It's initialized once inside the constructor. Useful when the value depends on runtime input.</a:t>
+              <a:t>speed variable is declared but not initialized immediately. It's initialized once inside the constructor. Useful when the value depends on runtime input.</a:t>
             </a:r>
           </a:p>
         </p:txBody>
@@ -6350,7 +6322,13 @@
   <p:cSld>
     <p:spTree>
       <p:nvGrpSpPr>
-        <p:cNvPr id="1" name=""/>
+        <p:cNvPr id="1" name="">
+          <a:extLst>
+            <a:ext uri="{FF2B5EF4-FFF2-40B4-BE49-F238E27FC236}">
+              <a16:creationId xmlns:a16="http://schemas.microsoft.com/office/drawing/2014/main" id="{5018AD5D-0D3A-BE2A-37D5-1CAD1C141BBB}"/>
+            </a:ext>
+          </a:extLst>
+        </p:cNvPr>
         <p:cNvGrpSpPr/>
         <p:nvPr/>
       </p:nvGrpSpPr>
@@ -6364,14 +6342,20 @@
       </p:grpSpPr>
       <p:sp>
         <p:nvSpPr>
-          <p:cNvPr id="2" name="Rectangle 1"/>
+          <p:cNvPr id="2" name="Rectangle 1">
+            <a:extLst>
+              <a:ext uri="{FF2B5EF4-FFF2-40B4-BE49-F238E27FC236}">
+                <a16:creationId xmlns:a16="http://schemas.microsoft.com/office/drawing/2014/main" id="{9945C0EF-2163-61F8-B989-D8F6F2AC6377}"/>
+              </a:ext>
+            </a:extLst>
+          </p:cNvPr>
           <p:cNvSpPr/>
           <p:nvPr/>
         </p:nvSpPr>
         <p:spPr>
           <a:xfrm>
-            <a:off x="665018" y="1341873"/>
-            <a:ext cx="9042400" cy="923330"/>
+            <a:off x="415636" y="1933001"/>
+            <a:ext cx="3741153" cy="1754326"/>
           </a:xfrm>
           <a:prstGeom prst="rect">
             <a:avLst/>
@@ -6385,13 +6369,8 @@
           <a:p>
             <a:r>
               <a:rPr lang="en-US" b="1" dirty="0"/>
-              <a:t>Static Blank Final </a:t>
-            </a:r>
-            <a:r>
-              <a:rPr lang="en-US" b="1" dirty="0" smtClean="0"/>
-              <a:t>Variable</a:t>
-            </a:r>
-            <a:endParaRPr lang="en-US" b="1" dirty="0"/>
+              <a:t>Blank Final Variable</a:t>
+            </a:r>
           </a:p>
           <a:p>
             <a:pPr>
@@ -6404,11 +6383,19 @@
             </a:r>
             <a:r>
               <a:rPr lang="en-US" b="1" dirty="0"/>
-              <a:t>static blank final</a:t>
-            </a:r>
-            <a:r>
-              <a:rPr lang="en-US" dirty="0"/>
-              <a:t> is a static final variable declared without a value.</a:t>
+              <a:t>blank final</a:t>
+            </a:r>
+            <a:r>
+              <a:rPr lang="en-US" dirty="0"/>
+              <a:t> variable is a final variable declared </a:t>
+            </a:r>
+            <a:r>
+              <a:rPr lang="en-US" b="1" dirty="0"/>
+              <a:t>without initialization</a:t>
+            </a:r>
+            <a:r>
+              <a:rPr lang="en-US" dirty="0"/>
+              <a:t>.</a:t>
             </a:r>
           </a:p>
           <a:p>
@@ -6422,26 +6409,32 @@
             </a:r>
             <a:r>
               <a:rPr lang="en-US" b="1" dirty="0"/>
-              <a:t>once</a:t>
-            </a:r>
-            <a:r>
-              <a:rPr lang="en-US" dirty="0"/>
-              <a:t> in a </a:t>
+              <a:t>only once</a:t>
+            </a:r>
+            <a:r>
+              <a:rPr lang="en-US" dirty="0"/>
+              <a:t>, typically in the </a:t>
             </a:r>
             <a:r>
               <a:rPr lang="en-US" b="1" dirty="0"/>
-              <a:t>static block</a:t>
-            </a:r>
-            <a:r>
-              <a:rPr lang="en-US" dirty="0"/>
-              <a:t> (not constructor).</a:t>
+              <a:t>constructor</a:t>
+            </a:r>
+            <a:r>
+              <a:rPr lang="en-US" dirty="0"/>
+              <a:t>.</a:t>
             </a:r>
           </a:p>
         </p:txBody>
       </p:sp>
       <p:pic>
         <p:nvPicPr>
-          <p:cNvPr id="3" name="Picture 2"/>
+          <p:cNvPr id="4" name="Picture 3">
+            <a:extLst>
+              <a:ext uri="{FF2B5EF4-FFF2-40B4-BE49-F238E27FC236}">
+                <a16:creationId xmlns:a16="http://schemas.microsoft.com/office/drawing/2014/main" id="{FB0C171C-5322-6F8A-778E-D9C4ECF14F6B}"/>
+              </a:ext>
+            </a:extLst>
+          </p:cNvPr>
           <p:cNvPicPr>
             <a:picLocks noChangeAspect="1"/>
           </p:cNvPicPr>
@@ -6449,68 +6442,25 @@
         </p:nvPicPr>
         <p:blipFill>
           <a:blip r:embed="rId2"/>
+          <a:srcRect b="3434"/>
           <a:stretch>
             <a:fillRect/>
           </a:stretch>
         </p:blipFill>
         <p:spPr>
           <a:xfrm>
-            <a:off x="4954313" y="2554009"/>
-            <a:ext cx="6908155" cy="3615238"/>
+            <a:off x="4544716" y="0"/>
+            <a:ext cx="7647284" cy="6622473"/>
           </a:xfrm>
           <a:prstGeom prst="rect">
             <a:avLst/>
           </a:prstGeom>
         </p:spPr>
       </p:pic>
-      <p:sp>
-        <p:nvSpPr>
-          <p:cNvPr id="4" name="Rectangle 3"/>
-          <p:cNvSpPr/>
-          <p:nvPr/>
-        </p:nvSpPr>
-        <p:spPr>
-          <a:xfrm>
-            <a:off x="203200" y="3161299"/>
-            <a:ext cx="4673600" cy="1200329"/>
-          </a:xfrm>
-          <a:prstGeom prst="rect">
-            <a:avLst/>
-          </a:prstGeom>
-        </p:spPr>
-        <p:txBody>
-          <a:bodyPr wrap="square">
-            <a:spAutoFit/>
-          </a:bodyPr>
-          <a:lstStyle/>
-          <a:p>
-            <a:r>
-              <a:rPr lang="en-US" dirty="0"/>
-              <a:t>A class-level final variable that's </a:t>
-            </a:r>
-            <a:r>
-              <a:rPr lang="en-US" dirty="0" smtClean="0"/>
-              <a:t>assigned </a:t>
-            </a:r>
-            <a:r>
-              <a:rPr lang="en-US" dirty="0"/>
-              <a:t>in a static block. It's initialized </a:t>
-            </a:r>
-            <a:r>
-              <a:rPr lang="en-US" dirty="0" smtClean="0"/>
-              <a:t>once when </a:t>
-            </a:r>
-            <a:r>
-              <a:rPr lang="en-US" dirty="0"/>
-              <a:t>the class is loaded, not per object.</a:t>
-            </a:r>
-          </a:p>
-        </p:txBody>
-      </p:sp>
     </p:spTree>
     <p:extLst>
       <p:ext uri="{BB962C8B-B14F-4D97-AF65-F5344CB8AC3E}">
-        <p14:creationId xmlns:p14="http://schemas.microsoft.com/office/powerpoint/2010/main" val="1623930326"/>
+        <p14:creationId xmlns:p14="http://schemas.microsoft.com/office/powerpoint/2010/main" val="2597356647"/>
       </p:ext>
     </p:extLst>
   </p:cSld>
@@ -6525,7 +6475,13 @@
   <p:cSld>
     <p:spTree>
       <p:nvGrpSpPr>
-        <p:cNvPr id="1" name=""/>
+        <p:cNvPr id="1" name="">
+          <a:extLst>
+            <a:ext uri="{FF2B5EF4-FFF2-40B4-BE49-F238E27FC236}">
+              <a16:creationId xmlns:a16="http://schemas.microsoft.com/office/drawing/2014/main" id="{34C064C8-7C9C-3619-BF96-977701DD85D1}"/>
+            </a:ext>
+          </a:extLst>
+        </p:cNvPr>
         <p:cNvGrpSpPr/>
         <p:nvPr/>
       </p:nvGrpSpPr>
@@ -6539,53 +6495,99 @@
       </p:grpSpPr>
       <p:sp>
         <p:nvSpPr>
-          <p:cNvPr id="3" name="Rectangle 2"/>
+          <p:cNvPr id="2" name="Rectangle 1">
+            <a:extLst>
+              <a:ext uri="{FF2B5EF4-FFF2-40B4-BE49-F238E27FC236}">
+                <a16:creationId xmlns:a16="http://schemas.microsoft.com/office/drawing/2014/main" id="{2C89B8BB-235A-E576-C916-98B233629B78}"/>
+              </a:ext>
+            </a:extLst>
+          </p:cNvPr>
           <p:cNvSpPr/>
           <p:nvPr/>
         </p:nvSpPr>
         <p:spPr>
           <a:xfrm>
-            <a:off x="730009" y="1350879"/>
-            <a:ext cx="5979522" cy="646331"/>
+            <a:off x="415636" y="1933001"/>
+            <a:ext cx="3741153" cy="1754326"/>
           </a:xfrm>
           <a:prstGeom prst="rect">
             <a:avLst/>
           </a:prstGeom>
         </p:spPr>
         <p:txBody>
-          <a:bodyPr wrap="none">
+          <a:bodyPr wrap="square">
             <a:spAutoFit/>
           </a:bodyPr>
           <a:lstStyle/>
           <a:p>
             <a:r>
-              <a:rPr lang="en-US" dirty="0"/>
-              <a:t>Final </a:t>
-            </a:r>
-            <a:r>
-              <a:rPr lang="en-US" dirty="0" smtClean="0"/>
-              <a:t>Method</a:t>
-            </a:r>
-          </a:p>
-          <a:p>
-            <a:r>
-              <a:rPr lang="en-US" dirty="0" smtClean="0"/>
-              <a:t>A final method </a:t>
-            </a:r>
-            <a:r>
               <a:rPr lang="en-US" b="1" dirty="0"/>
-              <a:t>cannot be overridden</a:t>
-            </a:r>
-            <a:r>
-              <a:rPr lang="en-US" dirty="0"/>
-              <a:t> by subclasses.</a:t>
+              <a:t>Blank Final Variable</a:t>
+            </a:r>
+          </a:p>
+          <a:p>
+            <a:pPr>
+              <a:buFont typeface="Arial" panose="020B0604020202020204" pitchFamily="34" charset="0"/>
+              <a:buChar char="•"/>
+            </a:pPr>
+            <a:r>
+              <a:rPr lang="en-US" dirty="0"/>
+              <a:t>A </a:t>
+            </a:r>
+            <a:r>
+              <a:rPr lang="en-US" b="1" dirty="0"/>
+              <a:t>blank final</a:t>
+            </a:r>
+            <a:r>
+              <a:rPr lang="en-US" dirty="0"/>
+              <a:t> variable is a final variable declared </a:t>
+            </a:r>
+            <a:r>
+              <a:rPr lang="en-US" b="1" dirty="0"/>
+              <a:t>without initialization</a:t>
+            </a:r>
+            <a:r>
+              <a:rPr lang="en-US" dirty="0"/>
+              <a:t>.</a:t>
+            </a:r>
+          </a:p>
+          <a:p>
+            <a:pPr>
+              <a:buFont typeface="Arial" panose="020B0604020202020204" pitchFamily="34" charset="0"/>
+              <a:buChar char="•"/>
+            </a:pPr>
+            <a:r>
+              <a:rPr lang="en-US" dirty="0"/>
+              <a:t>It must be initialized </a:t>
+            </a:r>
+            <a:r>
+              <a:rPr lang="en-US" b="1" dirty="0"/>
+              <a:t>only once</a:t>
+            </a:r>
+            <a:r>
+              <a:rPr lang="en-US" dirty="0"/>
+              <a:t>, typically in the </a:t>
+            </a:r>
+            <a:r>
+              <a:rPr lang="en-US" b="1" dirty="0"/>
+              <a:t>constructor</a:t>
+            </a:r>
+            <a:r>
+              <a:rPr lang="en-US" dirty="0"/>
+              <a:t>.</a:t>
             </a:r>
           </a:p>
         </p:txBody>
       </p:sp>
       <p:pic>
         <p:nvPicPr>
-          <p:cNvPr id="4" name="Picture 3"/>
+          <p:cNvPr id="5" name="Picture 4">
+            <a:extLst>
+              <a:ext uri="{FF2B5EF4-FFF2-40B4-BE49-F238E27FC236}">
+                <a16:creationId xmlns:a16="http://schemas.microsoft.com/office/drawing/2014/main" id="{5313E4CC-6E15-EEE6-6573-B1CDE9FD1D97}"/>
+              </a:ext>
+            </a:extLst>
+          </p:cNvPr>
           <p:cNvPicPr>
             <a:picLocks noChangeAspect="1"/>
           </p:cNvPicPr>
@@ -6599,46 +6601,18 @@
         </p:blipFill>
         <p:spPr>
           <a:xfrm>
-            <a:off x="5299233" y="2123703"/>
-            <a:ext cx="6426927" cy="4138551"/>
+            <a:off x="4448175" y="850756"/>
+            <a:ext cx="7743825" cy="5876925"/>
           </a:xfrm>
           <a:prstGeom prst="rect">
             <a:avLst/>
           </a:prstGeom>
         </p:spPr>
       </p:pic>
-      <p:sp>
-        <p:nvSpPr>
-          <p:cNvPr id="5" name="Rectangle 4"/>
-          <p:cNvSpPr/>
-          <p:nvPr/>
-        </p:nvSpPr>
-        <p:spPr>
-          <a:xfrm>
-            <a:off x="323274" y="4047989"/>
-            <a:ext cx="4516582" cy="1477328"/>
-          </a:xfrm>
-          <a:prstGeom prst="rect">
-            <a:avLst/>
-          </a:prstGeom>
-        </p:spPr>
-        <p:txBody>
-          <a:bodyPr wrap="square">
-            <a:spAutoFit/>
-          </a:bodyPr>
-          <a:lstStyle/>
-          <a:p>
-            <a:r>
-              <a:rPr lang="en-US" dirty="0"/>
-              <a:t>The method show() in the Parent class is marked as final, so the subclass Child cannot override it. This is used to protect method logic from being altered.</a:t>
-            </a:r>
-          </a:p>
-        </p:txBody>
-      </p:sp>
     </p:spTree>
     <p:extLst>
       <p:ext uri="{BB962C8B-B14F-4D97-AF65-F5344CB8AC3E}">
-        <p14:creationId xmlns:p14="http://schemas.microsoft.com/office/powerpoint/2010/main" val="37698530"/>
+        <p14:creationId xmlns:p14="http://schemas.microsoft.com/office/powerpoint/2010/main" val="459683016"/>
       </p:ext>
     </p:extLst>
   </p:cSld>
@@ -6673,14 +6647,168 @@
         </p:nvSpPr>
         <p:spPr>
           <a:xfrm>
-            <a:off x="622455" y="1350880"/>
-            <a:ext cx="4995278" cy="646331"/>
+            <a:off x="665018" y="1341873"/>
+            <a:ext cx="9042400" cy="923330"/>
           </a:xfrm>
           <a:prstGeom prst="rect">
             <a:avLst/>
           </a:prstGeom>
         </p:spPr>
         <p:txBody>
+          <a:bodyPr wrap="square">
+            <a:spAutoFit/>
+          </a:bodyPr>
+          <a:lstStyle/>
+          <a:p>
+            <a:r>
+              <a:rPr lang="en-US" b="1" dirty="0"/>
+              <a:t>Static Blank Final Variable</a:t>
+            </a:r>
+          </a:p>
+          <a:p>
+            <a:pPr>
+              <a:buFont typeface="Arial" panose="020B0604020202020204" pitchFamily="34" charset="0"/>
+              <a:buChar char="•"/>
+            </a:pPr>
+            <a:r>
+              <a:rPr lang="en-US" dirty="0"/>
+              <a:t>A </a:t>
+            </a:r>
+            <a:r>
+              <a:rPr lang="en-US" b="1" dirty="0"/>
+              <a:t>static blank final</a:t>
+            </a:r>
+            <a:r>
+              <a:rPr lang="en-US" dirty="0"/>
+              <a:t> is a static final variable declared without a value.</a:t>
+            </a:r>
+          </a:p>
+          <a:p>
+            <a:pPr>
+              <a:buFont typeface="Arial" panose="020B0604020202020204" pitchFamily="34" charset="0"/>
+              <a:buChar char="•"/>
+            </a:pPr>
+            <a:r>
+              <a:rPr lang="en-US" dirty="0"/>
+              <a:t>It must be initialized </a:t>
+            </a:r>
+            <a:r>
+              <a:rPr lang="en-US" b="1" dirty="0"/>
+              <a:t>once</a:t>
+            </a:r>
+            <a:r>
+              <a:rPr lang="en-US" dirty="0"/>
+              <a:t> in a </a:t>
+            </a:r>
+            <a:r>
+              <a:rPr lang="en-US" b="1" dirty="0"/>
+              <a:t>static block</a:t>
+            </a:r>
+            <a:r>
+              <a:rPr lang="en-US" dirty="0"/>
+              <a:t> (not constructor).</a:t>
+            </a:r>
+          </a:p>
+        </p:txBody>
+      </p:sp>
+      <p:pic>
+        <p:nvPicPr>
+          <p:cNvPr id="3" name="Picture 2"/>
+          <p:cNvPicPr>
+            <a:picLocks noChangeAspect="1"/>
+          </p:cNvPicPr>
+          <p:nvPr/>
+        </p:nvPicPr>
+        <p:blipFill>
+          <a:blip r:embed="rId2"/>
+          <a:stretch>
+            <a:fillRect/>
+          </a:stretch>
+        </p:blipFill>
+        <p:spPr>
+          <a:xfrm>
+            <a:off x="4954313" y="2554009"/>
+            <a:ext cx="6908155" cy="3615238"/>
+          </a:xfrm>
+          <a:prstGeom prst="rect">
+            <a:avLst/>
+          </a:prstGeom>
+        </p:spPr>
+      </p:pic>
+      <p:sp>
+        <p:nvSpPr>
+          <p:cNvPr id="4" name="Rectangle 3"/>
+          <p:cNvSpPr/>
+          <p:nvPr/>
+        </p:nvSpPr>
+        <p:spPr>
+          <a:xfrm>
+            <a:off x="203200" y="3161299"/>
+            <a:ext cx="4673600" cy="1200329"/>
+          </a:xfrm>
+          <a:prstGeom prst="rect">
+            <a:avLst/>
+          </a:prstGeom>
+        </p:spPr>
+        <p:txBody>
+          <a:bodyPr wrap="square">
+            <a:spAutoFit/>
+          </a:bodyPr>
+          <a:lstStyle/>
+          <a:p>
+            <a:r>
+              <a:rPr lang="en-US" dirty="0"/>
+              <a:t>A class-level final variable that's assigned in a static block. It's initialized once when the class is loaded, not per object.</a:t>
+            </a:r>
+          </a:p>
+        </p:txBody>
+      </p:sp>
+    </p:spTree>
+    <p:extLst>
+      <p:ext uri="{BB962C8B-B14F-4D97-AF65-F5344CB8AC3E}">
+        <p14:creationId xmlns:p14="http://schemas.microsoft.com/office/powerpoint/2010/main" val="1623930326"/>
+      </p:ext>
+    </p:extLst>
+  </p:cSld>
+  <p:clrMapOvr>
+    <a:masterClrMapping/>
+  </p:clrMapOvr>
+</p:sld>
+</file>
+
+<file path=ppt/slides/slide7.xml><?xml version="1.0" encoding="utf-8"?>
+<p:sld xmlns:a="http://schemas.openxmlformats.org/drawingml/2006/main" xmlns:r="http://schemas.openxmlformats.org/officeDocument/2006/relationships" xmlns:p="http://schemas.openxmlformats.org/presentationml/2006/main">
+  <p:cSld>
+    <p:spTree>
+      <p:nvGrpSpPr>
+        <p:cNvPr id="1" name=""/>
+        <p:cNvGrpSpPr/>
+        <p:nvPr/>
+      </p:nvGrpSpPr>
+      <p:grpSpPr>
+        <a:xfrm>
+          <a:off x="0" y="0"/>
+          <a:ext cx="0" cy="0"/>
+          <a:chOff x="0" y="0"/>
+          <a:chExt cx="0" cy="0"/>
+        </a:xfrm>
+      </p:grpSpPr>
+      <p:sp>
+        <p:nvSpPr>
+          <p:cNvPr id="3" name="Rectangle 2"/>
+          <p:cNvSpPr/>
+          <p:nvPr/>
+        </p:nvSpPr>
+        <p:spPr>
+          <a:xfrm>
+            <a:off x="730009" y="1350879"/>
+            <a:ext cx="5979522" cy="646331"/>
+          </a:xfrm>
+          <a:prstGeom prst="rect">
+            <a:avLst/>
+          </a:prstGeom>
+        </p:spPr>
+        <p:txBody>
           <a:bodyPr wrap="none">
             <a:spAutoFit/>
           </a:bodyPr>
@@ -6688,16 +6816,136 @@
           <a:p>
             <a:r>
               <a:rPr lang="en-US" dirty="0"/>
-              <a:t>Final </a:t>
-            </a:r>
-            <a:r>
-              <a:rPr lang="en-US" dirty="0" smtClean="0"/>
-              <a:t>Class</a:t>
-            </a:r>
-          </a:p>
-          <a:p>
-            <a:r>
-              <a:rPr lang="en-US" dirty="0" smtClean="0"/>
+              <a:t>Final Method</a:t>
+            </a:r>
+          </a:p>
+          <a:p>
+            <a:r>
+              <a:rPr lang="en-US" dirty="0"/>
+              <a:t>A final method </a:t>
+            </a:r>
+            <a:r>
+              <a:rPr lang="en-US" b="1" dirty="0"/>
+              <a:t>cannot be overridden</a:t>
+            </a:r>
+            <a:r>
+              <a:rPr lang="en-US" dirty="0"/>
+              <a:t> by subclasses.</a:t>
+            </a:r>
+          </a:p>
+        </p:txBody>
+      </p:sp>
+      <p:pic>
+        <p:nvPicPr>
+          <p:cNvPr id="4" name="Picture 3"/>
+          <p:cNvPicPr>
+            <a:picLocks noChangeAspect="1"/>
+          </p:cNvPicPr>
+          <p:nvPr/>
+        </p:nvPicPr>
+        <p:blipFill>
+          <a:blip r:embed="rId2"/>
+          <a:stretch>
+            <a:fillRect/>
+          </a:stretch>
+        </p:blipFill>
+        <p:spPr>
+          <a:xfrm>
+            <a:off x="5299233" y="2123703"/>
+            <a:ext cx="6426927" cy="4138551"/>
+          </a:xfrm>
+          <a:prstGeom prst="rect">
+            <a:avLst/>
+          </a:prstGeom>
+        </p:spPr>
+      </p:pic>
+      <p:sp>
+        <p:nvSpPr>
+          <p:cNvPr id="5" name="Rectangle 4"/>
+          <p:cNvSpPr/>
+          <p:nvPr/>
+        </p:nvSpPr>
+        <p:spPr>
+          <a:xfrm>
+            <a:off x="323274" y="4047989"/>
+            <a:ext cx="4516582" cy="1477328"/>
+          </a:xfrm>
+          <a:prstGeom prst="rect">
+            <a:avLst/>
+          </a:prstGeom>
+        </p:spPr>
+        <p:txBody>
+          <a:bodyPr wrap="square">
+            <a:spAutoFit/>
+          </a:bodyPr>
+          <a:lstStyle/>
+          <a:p>
+            <a:r>
+              <a:rPr lang="en-US" dirty="0"/>
+              <a:t>The method show() in the Parent class is marked as final, so the subclass Child cannot override it. This is used to protect method logic from being altered.</a:t>
+            </a:r>
+          </a:p>
+        </p:txBody>
+      </p:sp>
+    </p:spTree>
+    <p:extLst>
+      <p:ext uri="{BB962C8B-B14F-4D97-AF65-F5344CB8AC3E}">
+        <p14:creationId xmlns:p14="http://schemas.microsoft.com/office/powerpoint/2010/main" val="37698530"/>
+      </p:ext>
+    </p:extLst>
+  </p:cSld>
+  <p:clrMapOvr>
+    <a:masterClrMapping/>
+  </p:clrMapOvr>
+</p:sld>
+</file>
+
+<file path=ppt/slides/slide8.xml><?xml version="1.0" encoding="utf-8"?>
+<p:sld xmlns:a="http://schemas.openxmlformats.org/drawingml/2006/main" xmlns:r="http://schemas.openxmlformats.org/officeDocument/2006/relationships" xmlns:p="http://schemas.openxmlformats.org/presentationml/2006/main">
+  <p:cSld>
+    <p:spTree>
+      <p:nvGrpSpPr>
+        <p:cNvPr id="1" name=""/>
+        <p:cNvGrpSpPr/>
+        <p:nvPr/>
+      </p:nvGrpSpPr>
+      <p:grpSpPr>
+        <a:xfrm>
+          <a:off x="0" y="0"/>
+          <a:ext cx="0" cy="0"/>
+          <a:chOff x="0" y="0"/>
+          <a:chExt cx="0" cy="0"/>
+        </a:xfrm>
+      </p:grpSpPr>
+      <p:sp>
+        <p:nvSpPr>
+          <p:cNvPr id="2" name="Rectangle 1"/>
+          <p:cNvSpPr/>
+          <p:nvPr/>
+        </p:nvSpPr>
+        <p:spPr>
+          <a:xfrm>
+            <a:off x="622455" y="1350880"/>
+            <a:ext cx="4995278" cy="646331"/>
+          </a:xfrm>
+          <a:prstGeom prst="rect">
+            <a:avLst/>
+          </a:prstGeom>
+        </p:spPr>
+        <p:txBody>
+          <a:bodyPr wrap="none">
+            <a:spAutoFit/>
+          </a:bodyPr>
+          <a:lstStyle/>
+          <a:p>
+            <a:r>
+              <a:rPr lang="en-US" dirty="0"/>
+              <a:t>Final Class</a:t>
+            </a:r>
+          </a:p>
+          <a:p>
+            <a:r>
+              <a:rPr lang="en-US" dirty="0"/>
               <a:t>A final class </a:t>
             </a:r>
             <a:r>
